--- a/wechat-agentteams-e2e/presentaion/AgentInfra_初赛方案_ServiceDeskPilot_V2.2.pptx
+++ b/wechat-agentteams-e2e/presentaion/AgentInfra_初赛方案_ServiceDeskPilot_V2.2.pptx
@@ -2721,382 +2721,289 @@
           </a:p>
         </p:txBody>
       </p:sp>
-      <p:sp>
-        <p:nvSpPr>
-          <p:cNvPr id="14" name="矩形 13" descr="{&quot;isTemplate&quot;:true,&quot;type&quot;:&quot;text&quot;}"/>
-          <p:cNvSpPr/>
-          <p:nvPr/>
-        </p:nvSpPr>
-        <p:spPr>
-          <a:xfrm>
-            <a:off x="762120" y="6210360"/>
-            <a:ext cx="2047680" cy="190080"/>
-          </a:xfrm>
-          <a:prstGeom prst="rect">
-            <a:avLst/>
-          </a:prstGeom>
-          <a:noFill/>
-          <a:ln w="0">
-            <a:noFill/>
-          </a:ln>
-        </p:spPr>
-        <p:style>
-          <a:lnRef idx="0">
-            <a:srgbClr val="FFFFFF"/>
-          </a:lnRef>
-          <a:fillRef idx="0">
-            <a:srgbClr val="FFFFFF"/>
-          </a:fillRef>
-          <a:effectRef idx="0">
-            <a:srgbClr val="FFFFFF"/>
-          </a:effectRef>
-          <a:fontRef idx="minor"/>
-        </p:style>
-        <p:txBody>
-          <a:bodyPr wrap="none" lIns="0" tIns="0" rIns="0" bIns="0" anchor="t">
-            <a:noAutofit/>
-          </a:bodyPr>
-          <a:p>
-            <a:pPr defTabSz="914400">
-              <a:lnSpc>
-                <a:spcPct val="100000"/>
-              </a:lnSpc>
-            </a:pPr>
-            <a:r>
-              <a:rPr lang="zh-CN" sz="1200" b="0" u="none" strike="noStrike">
-                <a:solidFill>
-                  <a:srgbClr val="FFFFFF">
-                    <a:alpha val="70000"/>
-                  </a:srgbClr>
-                </a:solidFill>
-                <a:effectLst/>
-                <a:uFillTx/>
-                <a:latin typeface="微软雅黑" panose="020B0503020204020204" charset="-122"/>
-                <a:ea typeface="微软雅黑" panose="020B0503020204020204" charset="-122"/>
-              </a:rPr>
-              <a:t>初赛方案</a:t>
-            </a:r>
-            <a:r>
-              <a:rPr lang="en-US" sz="1200" b="0" u="none" strike="noStrike">
-                <a:solidFill>
-                  <a:srgbClr val="FFFFFF">
-                    <a:alpha val="70000"/>
-                  </a:srgbClr>
-                </a:solidFill>
-                <a:effectLst/>
-                <a:uFillTx/>
-                <a:latin typeface="微软雅黑" panose="020B0503020204020204" charset="-122"/>
-                <a:ea typeface="微软雅黑" panose="020B0503020204020204" charset="-122"/>
-              </a:rPr>
-              <a:t> </a:t>
-            </a:r>
-            <a:r>
-              <a:rPr lang="en-US" sz="1200" b="0" u="none" strike="noStrike">
-                <a:solidFill>
-                  <a:srgbClr val="FFFFFF">
-                    <a:alpha val="70000"/>
-                  </a:srgbClr>
-                </a:solidFill>
-                <a:effectLst/>
-                <a:uFillTx/>
-                <a:latin typeface="微软雅黑" panose="020B0503020204020204" charset="-122"/>
-                <a:ea typeface="微软雅黑" panose="020B0503020204020204" charset="-122"/>
-              </a:rPr>
-              <a:t>· V2 </a:t>
-            </a:r>
-            <a:r>
-              <a:rPr lang="zh-CN" sz="1200" b="0" u="none" strike="noStrike">
-                <a:solidFill>
-                  <a:srgbClr val="FFFFFF">
-                    <a:alpha val="70000"/>
-                  </a:srgbClr>
-                </a:solidFill>
-                <a:effectLst/>
-                <a:uFillTx/>
-                <a:latin typeface="微软雅黑" panose="020B0503020204020204" charset="-122"/>
-                <a:ea typeface="微软雅黑" panose="020B0503020204020204" charset="-122"/>
-              </a:rPr>
-              <a:t>赛题格式完整版</a:t>
-            </a:r>
-            <a:endParaRPr lang="en-US" sz="1200" b="0" u="none" strike="noStrike">
-              <a:solidFill>
-                <a:srgbClr val="000000"/>
-              </a:solidFill>
-              <a:effectLst/>
-              <a:uFillTx/>
-              <a:latin typeface="Arial" panose="020B0604020202020204"/>
-            </a:endParaRPr>
-          </a:p>
-        </p:txBody>
-      </p:sp>
-      <p:sp>
-        <p:nvSpPr>
-          <p:cNvPr id="15" name="矩形 14" descr="{&quot;isTemplate&quot;:true,&quot;type&quot;:&quot;text&quot;}"/>
-          <p:cNvSpPr/>
-          <p:nvPr/>
-        </p:nvSpPr>
-        <p:spPr>
-          <a:xfrm>
-            <a:off x="7800840" y="6210360"/>
-            <a:ext cx="990360" cy="190080"/>
-          </a:xfrm>
-          <a:prstGeom prst="rect">
-            <a:avLst/>
-          </a:prstGeom>
-          <a:noFill/>
-          <a:ln w="0">
-            <a:noFill/>
-          </a:ln>
-        </p:spPr>
-        <p:style>
-          <a:lnRef idx="0">
-            <a:srgbClr val="FFFFFF"/>
-          </a:lnRef>
-          <a:fillRef idx="0">
-            <a:srgbClr val="FFFFFF"/>
-          </a:fillRef>
-          <a:effectRef idx="0">
-            <a:srgbClr val="FFFFFF"/>
-          </a:effectRef>
-          <a:fontRef idx="minor"/>
-        </p:style>
-        <p:txBody>
-          <a:bodyPr wrap="none" lIns="0" tIns="0" rIns="0" bIns="0" anchor="t">
-            <a:noAutofit/>
-          </a:bodyPr>
-          <a:p>
-            <a:pPr defTabSz="914400">
-              <a:lnSpc>
-                <a:spcPct val="100000"/>
-              </a:lnSpc>
-            </a:pPr>
-            <a:r>
-              <a:rPr lang="zh-CN" sz="1200" b="0" u="none" strike="noStrike">
-                <a:solidFill>
-                  <a:srgbClr val="FFFFFF">
-                    <a:alpha val="70000"/>
-                  </a:srgbClr>
-                </a:solidFill>
-                <a:effectLst/>
-                <a:uFillTx/>
-                <a:latin typeface="微软雅黑" panose="020B0503020204020204" charset="-122"/>
-                <a:ea typeface="微软雅黑" panose="020B0503020204020204" charset="-122"/>
-              </a:rPr>
-              <a:t>多</a:t>
-            </a:r>
-            <a:r>
-              <a:rPr lang="en-US" sz="1200" b="0" u="none" strike="noStrike">
-                <a:solidFill>
-                  <a:srgbClr val="FFFFFF">
-                    <a:alpha val="70000"/>
-                  </a:srgbClr>
-                </a:solidFill>
-                <a:effectLst/>
-                <a:uFillTx/>
-                <a:latin typeface="微软雅黑" panose="020B0503020204020204" charset="-122"/>
-                <a:ea typeface="微软雅黑" panose="020B0503020204020204" charset="-122"/>
-              </a:rPr>
-              <a:t> </a:t>
-            </a:r>
-            <a:r>
-              <a:rPr lang="en-US" sz="1200" b="0" u="none" strike="noStrike">
-                <a:solidFill>
-                  <a:srgbClr val="FFFFFF">
-                    <a:alpha val="70000"/>
-                  </a:srgbClr>
-                </a:solidFill>
-                <a:effectLst/>
-                <a:uFillTx/>
-                <a:latin typeface="微软雅黑" panose="020B0503020204020204" charset="-122"/>
-                <a:ea typeface="微软雅黑" panose="020B0503020204020204" charset="-122"/>
-              </a:rPr>
-              <a:t>Agent </a:t>
-            </a:r>
-            <a:r>
-              <a:rPr lang="zh-CN" sz="1200" b="0" u="none" strike="noStrike">
-                <a:solidFill>
-                  <a:srgbClr val="FFFFFF">
-                    <a:alpha val="70000"/>
-                  </a:srgbClr>
-                </a:solidFill>
-                <a:effectLst/>
-                <a:uFillTx/>
-                <a:latin typeface="微软雅黑" panose="020B0503020204020204" charset="-122"/>
-                <a:ea typeface="微软雅黑" panose="020B0503020204020204" charset="-122"/>
-              </a:rPr>
-              <a:t>协同</a:t>
-            </a:r>
-            <a:endParaRPr lang="en-US" sz="1200" b="0" u="none" strike="noStrike">
-              <a:solidFill>
-                <a:srgbClr val="000000"/>
-              </a:solidFill>
-              <a:effectLst/>
-              <a:uFillTx/>
-              <a:latin typeface="Arial" panose="020B0604020202020204"/>
-            </a:endParaRPr>
-          </a:p>
-        </p:txBody>
-      </p:sp>
-      <p:sp>
-        <p:nvSpPr>
-          <p:cNvPr id="16" name="矩形 15" descr="{&quot;isTemplate&quot;:true,&quot;type&quot;:&quot;text&quot;}"/>
-          <p:cNvSpPr/>
-          <p:nvPr/>
-        </p:nvSpPr>
-        <p:spPr>
-          <a:xfrm>
-            <a:off x="9020160" y="6210360"/>
-            <a:ext cx="799920" cy="190080"/>
-          </a:xfrm>
-          <a:prstGeom prst="rect">
-            <a:avLst/>
-          </a:prstGeom>
-          <a:noFill/>
-          <a:ln w="0">
-            <a:noFill/>
-          </a:ln>
-        </p:spPr>
-        <p:style>
-          <a:lnRef idx="0">
-            <a:srgbClr val="FFFFFF"/>
-          </a:lnRef>
-          <a:fillRef idx="0">
-            <a:srgbClr val="FFFFFF"/>
-          </a:fillRef>
-          <a:effectRef idx="0">
-            <a:srgbClr val="FFFFFF"/>
-          </a:effectRef>
-          <a:fontRef idx="minor"/>
-        </p:style>
-        <p:txBody>
-          <a:bodyPr wrap="none" lIns="0" tIns="0" rIns="0" bIns="0" anchor="t">
-            <a:noAutofit/>
-          </a:bodyPr>
-          <a:p>
-            <a:pPr defTabSz="914400">
-              <a:lnSpc>
-                <a:spcPct val="100000"/>
-              </a:lnSpc>
-            </a:pPr>
-            <a:r>
-              <a:rPr lang="en-US" sz="1200" b="0" u="none" strike="noStrike">
-                <a:solidFill>
-                  <a:srgbClr val="FFFFFF">
-                    <a:alpha val="70000"/>
-                  </a:srgbClr>
-                </a:solidFill>
-                <a:effectLst/>
-                <a:uFillTx/>
-                <a:latin typeface="微软雅黑" panose="020B0503020204020204" charset="-122"/>
-                <a:ea typeface="微软雅黑" panose="020B0503020204020204" charset="-122"/>
-              </a:rPr>
-              <a:t>Skill </a:t>
-            </a:r>
-            <a:r>
-              <a:rPr lang="zh-CN" sz="1200" b="0" u="none" strike="noStrike">
-                <a:solidFill>
-                  <a:srgbClr val="FFFFFF">
-                    <a:alpha val="70000"/>
-                  </a:srgbClr>
-                </a:solidFill>
-                <a:effectLst/>
-                <a:uFillTx/>
-                <a:latin typeface="微软雅黑" panose="020B0503020204020204" charset="-122"/>
-                <a:ea typeface="微软雅黑" panose="020B0503020204020204" charset="-122"/>
-              </a:rPr>
-              <a:t>工程化</a:t>
-            </a:r>
-            <a:endParaRPr lang="en-US" sz="1200" b="0" u="none" strike="noStrike">
-              <a:solidFill>
-                <a:srgbClr val="000000"/>
-              </a:solidFill>
-              <a:effectLst/>
-              <a:uFillTx/>
-              <a:latin typeface="Arial" panose="020B0604020202020204"/>
-            </a:endParaRPr>
-          </a:p>
-        </p:txBody>
-      </p:sp>
-      <p:sp>
-        <p:nvSpPr>
-          <p:cNvPr id="17" name="矩形 16" descr="{&quot;isTemplate&quot;:true,&quot;type&quot;:&quot;text&quot;}"/>
-          <p:cNvSpPr/>
-          <p:nvPr/>
-        </p:nvSpPr>
-        <p:spPr>
-          <a:xfrm>
-            <a:off x="10049040" y="6210360"/>
-            <a:ext cx="1380600" cy="190080"/>
-          </a:xfrm>
-          <a:prstGeom prst="rect">
-            <a:avLst/>
-          </a:prstGeom>
-          <a:noFill/>
-          <a:ln w="0">
-            <a:noFill/>
-          </a:ln>
-        </p:spPr>
-        <p:style>
-          <a:lnRef idx="0">
-            <a:srgbClr val="FFFFFF"/>
-          </a:lnRef>
-          <a:fillRef idx="0">
-            <a:srgbClr val="FFFFFF"/>
-          </a:fillRef>
-          <a:effectRef idx="0">
-            <a:srgbClr val="FFFFFF"/>
-          </a:effectRef>
-          <a:fontRef idx="minor"/>
-        </p:style>
-        <p:txBody>
-          <a:bodyPr wrap="none" lIns="0" tIns="0" rIns="0" bIns="0" anchor="t">
-            <a:noAutofit/>
-          </a:bodyPr>
-          <a:p>
-            <a:pPr defTabSz="914400">
-              <a:lnSpc>
-                <a:spcPct val="100000"/>
-              </a:lnSpc>
-            </a:pPr>
-            <a:r>
-              <a:rPr lang="en-US" sz="1200" b="0" u="none" strike="noStrike">
-                <a:solidFill>
-                  <a:srgbClr val="FFFFFF">
-                    <a:alpha val="70000"/>
-                  </a:srgbClr>
-                </a:solidFill>
-                <a:effectLst/>
-                <a:uFillTx/>
-                <a:latin typeface="微软雅黑" panose="020B0503020204020204" charset="-122"/>
-                <a:ea typeface="微软雅黑" panose="020B0503020204020204" charset="-122"/>
-              </a:rPr>
-              <a:t>MCP · RAG · </a:t>
-            </a:r>
-            <a:r>
-              <a:rPr lang="zh-CN" sz="1200" b="0" u="none" strike="noStrike">
-                <a:solidFill>
-                  <a:srgbClr val="FFFFFF">
-                    <a:alpha val="70000"/>
-                  </a:srgbClr>
-                </a:solidFill>
-                <a:effectLst/>
-                <a:uFillTx/>
-                <a:latin typeface="微软雅黑" panose="020B0503020204020204" charset="-122"/>
-                <a:ea typeface="微软雅黑" panose="020B0503020204020204" charset="-122"/>
-              </a:rPr>
-              <a:t>可观测</a:t>
-            </a:r>
-            <a:endParaRPr lang="en-US" sz="1200" b="0" u="none" strike="noStrike">
-              <a:solidFill>
-                <a:srgbClr val="000000"/>
-              </a:solidFill>
-              <a:effectLst/>
-              <a:uFillTx/>
-              <a:latin typeface="Arial" panose="020B0604020202020204"/>
-            </a:endParaRPr>
-          </a:p>
-        </p:txBody>
-      </p:sp>
+      <p:grpSp>
+        <p:nvGrpSpPr>
+          <p:cNvPr id="18" name="组合 17"/>
+          <p:cNvGrpSpPr/>
+          <p:nvPr/>
+        </p:nvGrpSpPr>
+        <p:grpSpPr>
+          <a:xfrm>
+            <a:off x="4281805" y="6021070"/>
+            <a:ext cx="3628390" cy="189230"/>
+            <a:chOff x="12285" y="9780"/>
+            <a:chExt cx="5714" cy="298"/>
+          </a:xfrm>
+        </p:grpSpPr>
+        <p:sp>
+          <p:nvSpPr>
+            <p:cNvPr id="15" name="矩形 14" descr="{&quot;isTemplate&quot;:true,&quot;type&quot;:&quot;text&quot;}"/>
+            <p:cNvSpPr/>
+            <p:nvPr/>
+          </p:nvSpPr>
+          <p:spPr>
+            <a:xfrm>
+              <a:off x="12285" y="9780"/>
+              <a:ext cx="1560" cy="299"/>
+            </a:xfrm>
+            <a:prstGeom prst="rect">
+              <a:avLst/>
+            </a:prstGeom>
+            <a:noFill/>
+            <a:ln w="0">
+              <a:noFill/>
+            </a:ln>
+          </p:spPr>
+          <p:style>
+            <a:lnRef idx="0">
+              <a:srgbClr val="FFFFFF"/>
+            </a:lnRef>
+            <a:fillRef idx="0">
+              <a:srgbClr val="FFFFFF"/>
+            </a:fillRef>
+            <a:effectRef idx="0">
+              <a:srgbClr val="FFFFFF"/>
+            </a:effectRef>
+            <a:fontRef idx="minor"/>
+          </p:style>
+          <p:txBody>
+            <a:bodyPr wrap="none" lIns="0" tIns="0" rIns="0" bIns="0" anchor="t">
+              <a:noAutofit/>
+            </a:bodyPr>
+            <a:p>
+              <a:pPr algn="l" defTabSz="914400">
+                <a:lnSpc>
+                  <a:spcPct val="100000"/>
+                </a:lnSpc>
+              </a:pPr>
+              <a:r>
+                <a:rPr lang="zh-CN" sz="1200" b="0" u="none" strike="noStrike">
+                  <a:solidFill>
+                    <a:srgbClr val="FFFFFF">
+                      <a:alpha val="70000"/>
+                    </a:srgbClr>
+                  </a:solidFill>
+                  <a:effectLst/>
+                  <a:uFillTx/>
+                  <a:latin typeface="微软雅黑" panose="020B0503020204020204" charset="-122"/>
+                  <a:ea typeface="微软雅黑" panose="020B0503020204020204" charset="-122"/>
+                </a:rPr>
+                <a:t>多</a:t>
+              </a:r>
+              <a:r>
+                <a:rPr lang="en-US" sz="1200" b="0" u="none" strike="noStrike">
+                  <a:solidFill>
+                    <a:srgbClr val="FFFFFF">
+                      <a:alpha val="70000"/>
+                    </a:srgbClr>
+                  </a:solidFill>
+                  <a:effectLst/>
+                  <a:uFillTx/>
+                  <a:latin typeface="微软雅黑" panose="020B0503020204020204" charset="-122"/>
+                  <a:ea typeface="微软雅黑" panose="020B0503020204020204" charset="-122"/>
+                </a:rPr>
+                <a:t> </a:t>
+              </a:r>
+              <a:r>
+                <a:rPr lang="en-US" sz="1200" b="0" u="none" strike="noStrike">
+                  <a:solidFill>
+                    <a:srgbClr val="FFFFFF">
+                      <a:alpha val="70000"/>
+                    </a:srgbClr>
+                  </a:solidFill>
+                  <a:effectLst/>
+                  <a:uFillTx/>
+                  <a:latin typeface="微软雅黑" panose="020B0503020204020204" charset="-122"/>
+                  <a:ea typeface="微软雅黑" panose="020B0503020204020204" charset="-122"/>
+                </a:rPr>
+                <a:t>Agent </a:t>
+              </a:r>
+              <a:r>
+                <a:rPr lang="zh-CN" sz="1200" b="0" u="none" strike="noStrike">
+                  <a:solidFill>
+                    <a:srgbClr val="FFFFFF">
+                      <a:alpha val="70000"/>
+                    </a:srgbClr>
+                  </a:solidFill>
+                  <a:effectLst/>
+                  <a:uFillTx/>
+                  <a:latin typeface="微软雅黑" panose="020B0503020204020204" charset="-122"/>
+                  <a:ea typeface="微软雅黑" panose="020B0503020204020204" charset="-122"/>
+                </a:rPr>
+                <a:t>协同</a:t>
+              </a:r>
+              <a:endParaRPr lang="en-US" sz="1200" b="0" u="none" strike="noStrike">
+                <a:solidFill>
+                  <a:srgbClr val="000000"/>
+                </a:solidFill>
+                <a:effectLst/>
+                <a:uFillTx/>
+                <a:latin typeface="Arial" panose="020B0604020202020204"/>
+              </a:endParaRPr>
+            </a:p>
+          </p:txBody>
+        </p:sp>
+        <p:sp>
+          <p:nvSpPr>
+            <p:cNvPr id="16" name="矩形 15" descr="{&quot;isTemplate&quot;:true,&quot;type&quot;:&quot;text&quot;}"/>
+            <p:cNvSpPr/>
+            <p:nvPr/>
+          </p:nvSpPr>
+          <p:spPr>
+            <a:xfrm>
+              <a:off x="14205" y="9780"/>
+              <a:ext cx="1260" cy="299"/>
+            </a:xfrm>
+            <a:prstGeom prst="rect">
+              <a:avLst/>
+            </a:prstGeom>
+            <a:noFill/>
+            <a:ln w="0">
+              <a:noFill/>
+            </a:ln>
+          </p:spPr>
+          <p:style>
+            <a:lnRef idx="0">
+              <a:srgbClr val="FFFFFF"/>
+            </a:lnRef>
+            <a:fillRef idx="0">
+              <a:srgbClr val="FFFFFF"/>
+            </a:fillRef>
+            <a:effectRef idx="0">
+              <a:srgbClr val="FFFFFF"/>
+            </a:effectRef>
+            <a:fontRef idx="minor"/>
+          </p:style>
+          <p:txBody>
+            <a:bodyPr wrap="none" lIns="0" tIns="0" rIns="0" bIns="0" anchor="t">
+              <a:noAutofit/>
+            </a:bodyPr>
+            <a:p>
+              <a:pPr algn="l" defTabSz="914400">
+                <a:lnSpc>
+                  <a:spcPct val="100000"/>
+                </a:lnSpc>
+              </a:pPr>
+              <a:r>
+                <a:rPr lang="en-US" sz="1200" b="0" u="none" strike="noStrike">
+                  <a:solidFill>
+                    <a:srgbClr val="FFFFFF">
+                      <a:alpha val="70000"/>
+                    </a:srgbClr>
+                  </a:solidFill>
+                  <a:effectLst/>
+                  <a:uFillTx/>
+                  <a:latin typeface="微软雅黑" panose="020B0503020204020204" charset="-122"/>
+                  <a:ea typeface="微软雅黑" panose="020B0503020204020204" charset="-122"/>
+                </a:rPr>
+                <a:t>Skill </a:t>
+              </a:r>
+              <a:r>
+                <a:rPr lang="zh-CN" sz="1200" b="0" u="none" strike="noStrike">
+                  <a:solidFill>
+                    <a:srgbClr val="FFFFFF">
+                      <a:alpha val="70000"/>
+                    </a:srgbClr>
+                  </a:solidFill>
+                  <a:effectLst/>
+                  <a:uFillTx/>
+                  <a:latin typeface="微软雅黑" panose="020B0503020204020204" charset="-122"/>
+                  <a:ea typeface="微软雅黑" panose="020B0503020204020204" charset="-122"/>
+                </a:rPr>
+                <a:t>工程化</a:t>
+              </a:r>
+              <a:endParaRPr lang="en-US" sz="1200" b="0" u="none" strike="noStrike">
+                <a:solidFill>
+                  <a:srgbClr val="000000"/>
+                </a:solidFill>
+                <a:effectLst/>
+                <a:uFillTx/>
+                <a:latin typeface="Arial" panose="020B0604020202020204"/>
+              </a:endParaRPr>
+            </a:p>
+          </p:txBody>
+        </p:sp>
+        <p:sp>
+          <p:nvSpPr>
+            <p:cNvPr id="17" name="矩形 16" descr="{&quot;isTemplate&quot;:true,&quot;type&quot;:&quot;text&quot;}"/>
+            <p:cNvSpPr/>
+            <p:nvPr/>
+          </p:nvSpPr>
+          <p:spPr>
+            <a:xfrm>
+              <a:off x="15825" y="9780"/>
+              <a:ext cx="2174" cy="299"/>
+            </a:xfrm>
+            <a:prstGeom prst="rect">
+              <a:avLst/>
+            </a:prstGeom>
+            <a:noFill/>
+            <a:ln w="0">
+              <a:noFill/>
+            </a:ln>
+          </p:spPr>
+          <p:style>
+            <a:lnRef idx="0">
+              <a:srgbClr val="FFFFFF"/>
+            </a:lnRef>
+            <a:fillRef idx="0">
+              <a:srgbClr val="FFFFFF"/>
+            </a:fillRef>
+            <a:effectRef idx="0">
+              <a:srgbClr val="FFFFFF"/>
+            </a:effectRef>
+            <a:fontRef idx="minor"/>
+          </p:style>
+          <p:txBody>
+            <a:bodyPr wrap="none" lIns="0" tIns="0" rIns="0" bIns="0" anchor="t">
+              <a:noAutofit/>
+            </a:bodyPr>
+            <a:p>
+              <a:pPr algn="l" defTabSz="914400">
+                <a:lnSpc>
+                  <a:spcPct val="100000"/>
+                </a:lnSpc>
+              </a:pPr>
+              <a:r>
+                <a:rPr lang="en-US" sz="1200" b="0" u="none" strike="noStrike">
+                  <a:solidFill>
+                    <a:srgbClr val="FFFFFF">
+                      <a:alpha val="70000"/>
+                    </a:srgbClr>
+                  </a:solidFill>
+                  <a:effectLst/>
+                  <a:uFillTx/>
+                  <a:latin typeface="微软雅黑" panose="020B0503020204020204" charset="-122"/>
+                  <a:ea typeface="微软雅黑" panose="020B0503020204020204" charset="-122"/>
+                </a:rPr>
+                <a:t>MCP · RAG · </a:t>
+              </a:r>
+              <a:r>
+                <a:rPr lang="zh-CN" sz="1200" b="0" u="none" strike="noStrike">
+                  <a:solidFill>
+                    <a:srgbClr val="FFFFFF">
+                      <a:alpha val="70000"/>
+                    </a:srgbClr>
+                  </a:solidFill>
+                  <a:effectLst/>
+                  <a:uFillTx/>
+                  <a:latin typeface="微软雅黑" panose="020B0503020204020204" charset="-122"/>
+                  <a:ea typeface="微软雅黑" panose="020B0503020204020204" charset="-122"/>
+                </a:rPr>
+                <a:t>可观测</a:t>
+              </a:r>
+              <a:endParaRPr lang="en-US" sz="1200" b="0" u="none" strike="noStrike">
+                <a:solidFill>
+                  <a:srgbClr val="000000"/>
+                </a:solidFill>
+                <a:effectLst/>
+                <a:uFillTx/>
+                <a:latin typeface="Arial" panose="020B0604020202020204"/>
+              </a:endParaRPr>
+            </a:p>
+          </p:txBody>
+        </p:sp>
+      </p:grpSp>
     </p:spTree>
   </p:cSld>
   <p:clrMapOvr>
